--- a/presentacion/Agentes_financieros_10K.pptx
+++ b/presentacion/Agentes_financieros_10K.pptx
@@ -2,19 +2,19 @@
 <file path=ppt/presentation.xml><?xml version="1.0" encoding="utf-8"?>
 <p:presentation xmlns:p="http://schemas.openxmlformats.org/presentationml/2006/main">
   <p:sldMasterIdLst>
-    <p:sldMasterId xmlns:r="http://schemas.openxmlformats.org/officeDocument/2006/relationships" id="2147483648" r:id="R187c60c919094f24"/>
+    <p:sldMasterId xmlns:r="http://schemas.openxmlformats.org/officeDocument/2006/relationships" id="2147483648" r:id="R31d976917e224d2e"/>
   </p:sldMasterIdLst>
   <p:notesMasterIdLst>
-    <p:notesMasterId xmlns:r="http://schemas.openxmlformats.org/officeDocument/2006/relationships" r:id="R59d8981af7e64d25"/>
+    <p:notesMasterId xmlns:r="http://schemas.openxmlformats.org/officeDocument/2006/relationships" r:id="R50f1afbfac7d4778"/>
   </p:notesMasterIdLst>
   <p:sldIdLst>
-    <p:sldId xmlns:r="http://schemas.openxmlformats.org/officeDocument/2006/relationships" id="256" r:id="R6df286d58dd74837"/>
-    <p:sldId xmlns:r="http://schemas.openxmlformats.org/officeDocument/2006/relationships" id="257" r:id="R5d4ba07320f54b60"/>
-    <p:sldId xmlns:r="http://schemas.openxmlformats.org/officeDocument/2006/relationships" id="258" r:id="R5e0e72d8914040be"/>
-    <p:sldId xmlns:r="http://schemas.openxmlformats.org/officeDocument/2006/relationships" id="259" r:id="R1e74ac5bb285444d"/>
-    <p:sldId xmlns:r="http://schemas.openxmlformats.org/officeDocument/2006/relationships" id="260" r:id="Rda40258f26774dea"/>
-    <p:sldId xmlns:r="http://schemas.openxmlformats.org/officeDocument/2006/relationships" id="261" r:id="R072042692a88488e"/>
-    <p:sldId xmlns:r="http://schemas.openxmlformats.org/officeDocument/2006/relationships" id="262" r:id="Rf07b9d699eb54739"/>
+    <p:sldId xmlns:r="http://schemas.openxmlformats.org/officeDocument/2006/relationships" id="256" r:id="R5e89ab5202f94544"/>
+    <p:sldId xmlns:r="http://schemas.openxmlformats.org/officeDocument/2006/relationships" id="257" r:id="Rb25aa5ce76274249"/>
+    <p:sldId xmlns:r="http://schemas.openxmlformats.org/officeDocument/2006/relationships" id="258" r:id="Re30160b71b014e26"/>
+    <p:sldId xmlns:r="http://schemas.openxmlformats.org/officeDocument/2006/relationships" id="259" r:id="Rd6a1bb2e859f4a3b"/>
+    <p:sldId xmlns:r="http://schemas.openxmlformats.org/officeDocument/2006/relationships" id="260" r:id="Rcc2286d772dd460d"/>
+    <p:sldId xmlns:r="http://schemas.openxmlformats.org/officeDocument/2006/relationships" id="261" r:id="R47e245698eef416e"/>
+    <p:sldId xmlns:r="http://schemas.openxmlformats.org/officeDocument/2006/relationships" id="262" r:id="Rd5dbbaa0d0724efb"/>
   </p:sldIdLst>
   <p:sldSz cx="12192000" cy="6858000"/>
   <p:notesSz cx="6858000" cy="9144000"/>
@@ -1158,32 +1158,17 @@
           <a:lstStyle xmlns:a="http://schemas.openxmlformats.org/drawingml/2006/main"/>
           <a:p xmlns:a="http://schemas.openxmlformats.org/drawingml/2006/main">
             <a:r>
-              <a:t>HIGINIO · 6:40–7:20 (40 s)</a:t>
-            </a:r>
-          </a:p>
-          <a:p xmlns:a="http://schemas.openxmlformats.org/drawingml/2006/main">
-            <a:r>
-              <a:t>Comparamos las mejores configuraciones elegidas sobre las mismas veinte preguntas. Los tres agentes pasan las seis extractivas, seis numéricas y ocho comparativas. La diferencia está en cómo llegamos: mi agente combina búsqueda híbrida y controles, Hugo refuerza el protocolo y valida las cifras, y Javier simplifica el flujo y precisa la abstención.</a:t>
-            </a:r>
-          </a:p>
-          <a:p xmlns:a="http://schemas.openxmlformats.org/drawingml/2006/main">
-            <a:r>
-              <a:t>HUGO · 7:20–8:00 (40 s)</a:t>
-            </a:r>
-          </a:p>
-          <a:p xmlns:a="http://schemas.openxmlformats.org/drawingml/2006/main">
-            <a:r>
-              <a:t>En estas ejecuciones mi configuración fue la más rápida, con doce segundos por pregunta. La de Javier registró el menor coste de agente, aunque falta sumar sus embeddings de consulta. Son pasadas distintas y cambiamos más elementos que el modelo: esto compara configuraciones completas, no demuestra que un LLM sea intrínsecamente mejor. El aprendizaje común es que resolver el formato, la evidencia y la ausencia de datos puede mejorar mucho el resultado sin cambiar de modelo. La prueba ciega aportará la siguiente medida.</a:t>
-            </a:r>
-          </a:p>
-          <a:p xmlns:a="http://schemas.openxmlformats.org/drawingml/2006/main">
-            <a:r>
-              <a:t>Detalle de procedencia: Higinio v018, CSV, coste 0,0083519625 USD y 14,9224851 s, 2,5 herramientas. Hugo v005, README, 3,42 centavos USD equivalen a 0,0342 USD, 12,0 s, 2,75 herramientas. Javier, notebook ajustado v3, coste conjunto equipo 0,02482 USD / 20 ≈ 0,001241 USD, 18,21 s, 2,9 herramientas. Los costes son los registrados en las campañas y no una consulta de tarifas actuales.</a:t>
-            </a:r>
-          </a:p>
-          <a:p xmlns:a="http://schemas.openxmlformats.org/drawingml/2006/main">
-            <a:r>
-              <a:t>El evaluador común comprueba cifras/unidades, nombres de herramientas y prefijo literal de cita. No evalúa la corrección semántica completa. Las pruebas de estrés o ausencia de cada compañero no son intercambiables. Higinio y Hugo incluyen verificación XBRL propia; Javier v3 usa abstención por prompt y no incorpora middleware propio.</a:t>
+              <a:t>La comparación usa las mismas veinte preguntas del equipo y las métricas medias guardadas por la interfaz entregable.</a:t>
+            </a:r>
+          </a:p>
+          <a:p xmlns:a="http://schemas.openxmlformats.org/drawingml/2006/main">
+            <a:r>
+              <a:t>Jchulvi v3 obtiene 20/20 frente a 11/20 del baseline. Mejora especialmente la familia comparativa, con 8/8 frente a 0/8.</a:t>
+            </a:r>
+          </a:p>
+          <a:p xmlns:a="http://schemas.openxmlformats.org/drawingml/2006/main">
+            <a:r>
+              <a:t>El coste medio por pregunta baja de 0,7592 a 0,1234 centavos y las llamadas medias pasan de 3,10 a 2,80; la latencia sube de 14,87 a 16,34 segundos.</a:t>
             </a:r>
           </a:p>
           <a:p xmlns:a="http://schemas.openxmlformats.org/drawingml/2006/main">
@@ -1193,32 +1178,27 @@
           </a:p>
           <a:p xmlns:a="http://schemas.openxmlformats.org/drawingml/2006/main">
             <a:r>
-              <a:t>Fuentes del repositorio (mediciones guardadas, septiembre de 2026):</a:t>
-            </a:r>
-          </a:p>
-          <a:p xmlns:a="http://schemas.openxmlformats.org/drawingml/2006/main">
-            <a:r>
-              <a:t>resultados/resumen_agente_v018.csv</a:t>
-            </a:r>
-          </a:p>
-          <a:p xmlns:a="http://schemas.openxmlformats.org/drawingml/2006/main">
-            <a:r>
-              <a:t>resultados/agente_v018.csv</a:t>
-            </a:r>
-          </a:p>
-          <a:p xmlns:a="http://schemas.openxmlformats.org/drawingml/2006/main">
-            <a:r>
-              <a:t>experimentos/hugo/README.md</a:t>
-            </a:r>
-          </a:p>
-          <a:p xmlns:a="http://schemas.openxmlformats.org/drawingml/2006/main">
-            <a:r>
-              <a:t>experimentos/jchulvi/validacion_agente_v3.ipynb</a:t>
-            </a:r>
-          </a:p>
-          <a:p xmlns:a="http://schemas.openxmlformats.org/drawingml/2006/main">
-            <a:r>
-              <a:t>experimentos/jchulvi/README.md</a:t>
+              <a:t>[Sources]</a:t>
+            </a:r>
+          </a:p>
+          <a:p xmlns:a="http://schemas.openxmlformats.org/drawingml/2006/main">
+            <a:r>
+              <a:t>README.md — sección Comparación de resultados resumidos</a:t>
+            </a:r>
+          </a:p>
+          <a:p xmlns:a="http://schemas.openxmlformats.org/drawingml/2006/main">
+            <a:r>
+              <a:t>resultados/resumen_baseline.csv</a:t>
+            </a:r>
+          </a:p>
+          <a:p xmlns:a="http://schemas.openxmlformats.org/drawingml/2006/main">
+            <a:r>
+              <a:t>resultados/resumen_jchulvi_v3.csv</a:t>
+            </a:r>
+          </a:p>
+          <a:p xmlns:a="http://schemas.openxmlformats.org/drawingml/2006/main">
+            <a:r>
+              <a:t>[/Sources]</a:t>
             </a:r>
           </a:p>
         </p:txBody>
@@ -1286,7 +1266,7 @@
   </p:cSld>
   <p:clrMap bg1="lt1" tx1="dk1" bg2="lt2" tx2="dk2" accent1="accent1" accent2="accent2" accent3="accent3" accent4="accent4" accent5="accent5" accent6="accent6" hlink="hlink" folHlink="folHlink"/>
   <p:sldLayoutIdLst>
-    <p:sldLayoutId xmlns:r="http://schemas.openxmlformats.org/officeDocument/2006/relationships" id="2147483649" r:id="Rddfb1f1c7bab4fae"/>
+    <p:sldLayoutId xmlns:r="http://schemas.openxmlformats.org/officeDocument/2006/relationships" id="2147483649" r:id="R7ca2a1d3e4e54bc4"/>
   </p:sldLayoutIdLst>
   <p:txStyles>
     <p:titleStyle>
@@ -1814,7 +1794,7 @@
 </file>
 
 <file path=ppt/slides/charts/chart1.xml><?xml version="1.0" encoding="utf-8"?>
-<c:chartSpace xmlns:c="http://schemas.openxmlformats.org/drawingml/2006/chart" xmlns:r="http://schemas.openxmlformats.org/officeDocument/2006/relationships">
+<c:chartSpace xmlns:c="http://schemas.openxmlformats.org/drawingml/2006/chart">
   <c:lang val="en-US"/>
   <c:chart>
     <c:plotArea>
@@ -1975,6 +1955,9 @@
           </a:p>
         </c:txPr>
         <c:crossAx val="48672768"/>
+        <c:lblAlgn val="ctr"/>
+        <c:lblOffset val="100"/>
+        <c:noMultiLvlLbl val="0"/>
       </c:catAx>
       <c:valAx>
         <c:axId val="48672768"/>
@@ -2041,14 +2024,11 @@
       <a:noFill/>
     </a:ln>
   </c:spPr>
-  <c:externalData r:id="rIdChartSnapshot1">
-    <c:autoUpdate val="0"/>
-  </c:externalData>
 </c:chartSpace>
 </file>
 
 <file path=ppt/slides/charts/chart2.xml><?xml version="1.0" encoding="utf-8"?>
-<c:chartSpace xmlns:c="http://schemas.openxmlformats.org/drawingml/2006/chart" xmlns:r="http://schemas.openxmlformats.org/officeDocument/2006/relationships">
+<c:chartSpace xmlns:c="http://schemas.openxmlformats.org/drawingml/2006/chart">
   <c:lang val="en-US"/>
   <c:chart>
     <c:plotArea>
@@ -2209,6 +2189,9 @@
           </a:p>
         </c:txPr>
         <c:crossAx val="48672768"/>
+        <c:lblAlgn val="ctr"/>
+        <c:lblOffset val="100"/>
+        <c:noMultiLvlLbl val="0"/>
       </c:catAx>
       <c:valAx>
         <c:axId val="48672768"/>
@@ -2275,9 +2258,6 @@
       <a:noFill/>
     </a:ln>
   </c:spPr>
-  <c:externalData r:id="rIdChartSnapshot1">
-    <c:autoUpdate val="0"/>
-  </c:externalData>
 </c:chartSpace>
 </file>
 
@@ -2334,6 +2314,7 @@
           <a:lstStyle xmlns:a="http://schemas.openxmlformats.org/drawingml/2006/main"/>
           <a:p xmlns:a="http://schemas.openxmlformats.org/drawingml/2006/main">
             <a:pPr>
+              <a:buNone/>
               <a:defRPr sz="1575" b="1">
                 <a:solidFill>
                   <a:srgbClr val="D4B57B"/>
@@ -2391,6 +2372,7 @@
           <a:lstStyle xmlns:a="http://schemas.openxmlformats.org/drawingml/2006/main"/>
           <a:p xmlns:a="http://schemas.openxmlformats.org/drawingml/2006/main">
             <a:pPr>
+              <a:buNone/>
               <a:defRPr sz="5100" b="1">
                 <a:solidFill>
                   <a:srgbClr val="F1F3F5"/>
@@ -2414,6 +2396,7 @@
           </a:p>
           <a:p xmlns:a="http://schemas.openxmlformats.org/drawingml/2006/main">
             <a:pPr>
+              <a:buNone/>
               <a:defRPr sz="5100" b="1">
                 <a:solidFill>
                   <a:srgbClr val="F1F3F5"/>
@@ -2471,6 +2454,7 @@
           <a:lstStyle xmlns:a="http://schemas.openxmlformats.org/drawingml/2006/main"/>
           <a:p xmlns:a="http://schemas.openxmlformats.org/drawingml/2006/main">
             <a:pPr>
+              <a:buNone/>
               <a:defRPr sz="2100" b="0">
                 <a:solidFill>
                   <a:srgbClr val="B7C4D2"/>
@@ -2528,6 +2512,7 @@
           <a:lstStyle xmlns:a="http://schemas.openxmlformats.org/drawingml/2006/main"/>
           <a:p xmlns:a="http://schemas.openxmlformats.org/drawingml/2006/main">
             <a:pPr>
+              <a:buNone/>
               <a:defRPr sz="2250" b="0">
                 <a:solidFill>
                   <a:srgbClr val="F1F3F5"/>
@@ -2585,6 +2570,7 @@
           <a:lstStyle xmlns:a="http://schemas.openxmlformats.org/drawingml/2006/main"/>
           <a:p xmlns:a="http://schemas.openxmlformats.org/drawingml/2006/main">
             <a:pPr>
+              <a:buNone/>
               <a:defRPr sz="1650" b="0">
                 <a:solidFill>
                   <a:srgbClr val="B7C4D2"/>
@@ -2671,6 +2657,7 @@
           <a:lstStyle xmlns:a="http://schemas.openxmlformats.org/drawingml/2006/main"/>
           <a:p xmlns:a="http://schemas.openxmlformats.org/drawingml/2006/main">
             <a:pPr>
+              <a:buNone/>
               <a:defRPr sz="3300" b="1">
                 <a:solidFill>
                   <a:srgbClr val="F1F3F5"/>
@@ -2728,6 +2715,7 @@
           <a:lstStyle xmlns:a="http://schemas.openxmlformats.org/drawingml/2006/main"/>
           <a:p xmlns:a="http://schemas.openxmlformats.org/drawingml/2006/main">
             <a:pPr>
+              <a:buNone/>
               <a:defRPr sz="1725" b="0">
                 <a:solidFill>
                   <a:srgbClr val="B7C4D2"/>
@@ -2785,6 +2773,7 @@
           <a:lstStyle xmlns:a="http://schemas.openxmlformats.org/drawingml/2006/main"/>
           <a:p xmlns:a="http://schemas.openxmlformats.org/drawingml/2006/main">
             <a:pPr>
+              <a:buNone/>
               <a:defRPr sz="1275" b="0">
                 <a:solidFill>
                   <a:srgbClr val="B7C4D2"/>
@@ -2842,6 +2831,7 @@
           <a:lstStyle xmlns:a="http://schemas.openxmlformats.org/drawingml/2006/main"/>
           <a:p xmlns:a="http://schemas.openxmlformats.org/drawingml/2006/main">
             <a:pPr>
+              <a:buNone/>
               <a:defRPr sz="1875" b="0">
                 <a:solidFill>
                   <a:srgbClr val="B7C4D2"/>
@@ -2867,7 +2857,7 @@
       </p:sp>
       <p:graphicFrame>
         <p:nvGraphicFramePr>
-          <p:cNvPr id="15" name="Chart"/>
+          <p:cNvPr id="17" name="Chart"/>
           <p:cNvGraphicFramePr/>
           <p:nvPr/>
         </p:nvGraphicFramePr>
@@ -2877,7 +2867,7 @@
         </p:xfrm>
         <a:graphic xmlns:a="http://schemas.openxmlformats.org/drawingml/2006/main">
           <a:graphicData uri="http://schemas.openxmlformats.org/drawingml/2006/chart">
-            <c:chart xmlns:r="http://schemas.openxmlformats.org/officeDocument/2006/relationships" xmlns:c="http://schemas.openxmlformats.org/drawingml/2006/chart" r:id="R2046653b994d4a46"/>
+            <c:chart xmlns:r="http://schemas.openxmlformats.org/officeDocument/2006/relationships" xmlns:c="http://schemas.openxmlformats.org/drawingml/2006/chart" r:id="Rfc4918cc6c7c4261"/>
           </a:graphicData>
         </a:graphic>
       </p:graphicFrame>
@@ -2915,6 +2905,7 @@
           <a:lstStyle xmlns:a="http://schemas.openxmlformats.org/drawingml/2006/main"/>
           <a:p xmlns:a="http://schemas.openxmlformats.org/drawingml/2006/main">
             <a:pPr>
+              <a:buNone/>
               <a:defRPr sz="2100" b="1">
                 <a:solidFill>
                   <a:srgbClr val="D4B57B"/>
@@ -2972,6 +2963,7 @@
           <a:lstStyle xmlns:a="http://schemas.openxmlformats.org/drawingml/2006/main"/>
           <a:p xmlns:a="http://schemas.openxmlformats.org/drawingml/2006/main">
             <a:pPr>
+              <a:buNone/>
               <a:defRPr sz="1875" b="0">
                 <a:solidFill>
                   <a:srgbClr val="F1F3F5"/>
@@ -2995,6 +2987,7 @@
           </a:p>
           <a:p xmlns:a="http://schemas.openxmlformats.org/drawingml/2006/main">
             <a:pPr>
+              <a:buNone/>
               <a:defRPr sz="1875" b="0">
                 <a:solidFill>
                   <a:srgbClr val="F1F3F5"/>
@@ -3052,6 +3045,7 @@
           <a:lstStyle xmlns:a="http://schemas.openxmlformats.org/drawingml/2006/main"/>
           <a:p xmlns:a="http://schemas.openxmlformats.org/drawingml/2006/main">
             <a:pPr>
+              <a:buNone/>
               <a:defRPr sz="1950" b="1">
                 <a:solidFill>
                   <a:srgbClr val="F1F3F5"/>
@@ -3109,6 +3103,7 @@
           <a:lstStyle xmlns:a="http://schemas.openxmlformats.org/drawingml/2006/main"/>
           <a:p xmlns:a="http://schemas.openxmlformats.org/drawingml/2006/main">
             <a:pPr>
+              <a:buNone/>
               <a:defRPr sz="1800" b="0">
                 <a:solidFill>
                   <a:srgbClr val="B7C4D2"/>
@@ -3132,6 +3127,7 @@
           </a:p>
           <a:p xmlns:a="http://schemas.openxmlformats.org/drawingml/2006/main">
             <a:pPr>
+              <a:buNone/>
               <a:defRPr sz="1800" b="0">
                 <a:solidFill>
                   <a:srgbClr val="B7C4D2"/>
@@ -3155,6 +3151,7 @@
           </a:p>
           <a:p xmlns:a="http://schemas.openxmlformats.org/drawingml/2006/main">
             <a:pPr>
+              <a:buNone/>
               <a:defRPr sz="1800" b="0">
                 <a:solidFill>
                   <a:srgbClr val="B7C4D2"/>
@@ -3212,6 +3209,7 @@
           <a:lstStyle xmlns:a="http://schemas.openxmlformats.org/drawingml/2006/main"/>
           <a:p xmlns:a="http://schemas.openxmlformats.org/drawingml/2006/main">
             <a:pPr>
+              <a:buNone/>
               <a:defRPr sz="1800" b="0">
                 <a:solidFill>
                   <a:srgbClr val="B7C4D2"/>
@@ -3298,6 +3296,7 @@
           <a:lstStyle xmlns:a="http://schemas.openxmlformats.org/drawingml/2006/main"/>
           <a:p xmlns:a="http://schemas.openxmlformats.org/drawingml/2006/main">
             <a:pPr>
+              <a:buNone/>
               <a:defRPr sz="3300" b="1">
                 <a:solidFill>
                   <a:srgbClr val="F1F3F5"/>
@@ -3355,6 +3354,7 @@
           <a:lstStyle xmlns:a="http://schemas.openxmlformats.org/drawingml/2006/main"/>
           <a:p xmlns:a="http://schemas.openxmlformats.org/drawingml/2006/main">
             <a:pPr>
+              <a:buNone/>
               <a:defRPr sz="1725" b="0">
                 <a:solidFill>
                   <a:srgbClr val="B7C4D2"/>
@@ -3412,6 +3412,7 @@
           <a:lstStyle xmlns:a="http://schemas.openxmlformats.org/drawingml/2006/main"/>
           <a:p xmlns:a="http://schemas.openxmlformats.org/drawingml/2006/main">
             <a:pPr>
+              <a:buNone/>
               <a:defRPr sz="1275" b="0">
                 <a:solidFill>
                   <a:srgbClr val="B7C4D2"/>
@@ -3469,6 +3470,7 @@
           <a:lstStyle xmlns:a="http://schemas.openxmlformats.org/drawingml/2006/main"/>
           <a:p xmlns:a="http://schemas.openxmlformats.org/drawingml/2006/main">
             <a:pPr>
+              <a:buNone/>
               <a:defRPr sz="1875" b="0">
                 <a:solidFill>
                   <a:srgbClr val="B7C4D2"/>
@@ -3494,7 +3496,7 @@
       </p:sp>
       <p:graphicFrame>
         <p:nvGraphicFramePr>
-          <p:cNvPr id="14" name="Chart"/>
+          <p:cNvPr id="16" name="Chart"/>
           <p:cNvGraphicFramePr/>
           <p:nvPr/>
         </p:nvGraphicFramePr>
@@ -3504,7 +3506,7 @@
         </p:xfrm>
         <a:graphic xmlns:a="http://schemas.openxmlformats.org/drawingml/2006/main">
           <a:graphicData uri="http://schemas.openxmlformats.org/drawingml/2006/chart">
-            <c:chart xmlns:r="http://schemas.openxmlformats.org/officeDocument/2006/relationships" xmlns:c="http://schemas.openxmlformats.org/drawingml/2006/chart" r:id="R40fdcc5d51e246dc"/>
+            <c:chart xmlns:r="http://schemas.openxmlformats.org/officeDocument/2006/relationships" xmlns:c="http://schemas.openxmlformats.org/drawingml/2006/chart" r:id="R1828361ef31242cf"/>
           </a:graphicData>
         </a:graphic>
       </p:graphicFrame>
@@ -3542,6 +3544,7 @@
           <a:lstStyle xmlns:a="http://schemas.openxmlformats.org/drawingml/2006/main"/>
           <a:p xmlns:a="http://schemas.openxmlformats.org/drawingml/2006/main">
             <a:pPr>
+              <a:buNone/>
               <a:defRPr sz="2100" b="1">
                 <a:solidFill>
                   <a:srgbClr val="D4B57B"/>
@@ -3599,6 +3602,7 @@
           <a:lstStyle xmlns:a="http://schemas.openxmlformats.org/drawingml/2006/main"/>
           <a:p xmlns:a="http://schemas.openxmlformats.org/drawingml/2006/main">
             <a:pPr>
+              <a:buNone/>
               <a:defRPr sz="1875" b="0">
                 <a:solidFill>
                   <a:srgbClr val="F1F3F5"/>
@@ -3622,6 +3626,7 @@
           </a:p>
           <a:p xmlns:a="http://schemas.openxmlformats.org/drawingml/2006/main">
             <a:pPr>
+              <a:buNone/>
               <a:defRPr sz="1875" b="0">
                 <a:solidFill>
                   <a:srgbClr val="F1F3F5"/>
@@ -3645,6 +3650,7 @@
           </a:p>
           <a:p xmlns:a="http://schemas.openxmlformats.org/drawingml/2006/main">
             <a:pPr>
+              <a:buNone/>
               <a:defRPr sz="1875" b="0">
                 <a:solidFill>
                   <a:srgbClr val="F1F3F5"/>
@@ -3668,6 +3674,7 @@
           </a:p>
           <a:p xmlns:a="http://schemas.openxmlformats.org/drawingml/2006/main">
             <a:pPr>
+              <a:buNone/>
               <a:defRPr sz="1875" b="0">
                 <a:solidFill>
                   <a:srgbClr val="F1F3F5"/>
@@ -3725,6 +3732,7 @@
           <a:lstStyle xmlns:a="http://schemas.openxmlformats.org/drawingml/2006/main"/>
           <a:p xmlns:a="http://schemas.openxmlformats.org/drawingml/2006/main">
             <a:pPr>
+              <a:buNone/>
               <a:defRPr sz="1950" b="1">
                 <a:solidFill>
                   <a:srgbClr val="F1F3F5"/>
@@ -3782,6 +3790,7 @@
           <a:lstStyle xmlns:a="http://schemas.openxmlformats.org/drawingml/2006/main"/>
           <a:p xmlns:a="http://schemas.openxmlformats.org/drawingml/2006/main">
             <a:pPr>
+              <a:buNone/>
               <a:defRPr sz="1800" b="0">
                 <a:solidFill>
                   <a:srgbClr val="B7C4D2"/>
@@ -3868,6 +3877,7 @@
           <a:lstStyle xmlns:a="http://schemas.openxmlformats.org/drawingml/2006/main"/>
           <a:p xmlns:a="http://schemas.openxmlformats.org/drawingml/2006/main">
             <a:pPr>
+              <a:buNone/>
               <a:defRPr sz="3300" b="1">
                 <a:solidFill>
                   <a:srgbClr val="F1F3F5"/>
@@ -3925,6 +3935,7 @@
           <a:lstStyle xmlns:a="http://schemas.openxmlformats.org/drawingml/2006/main"/>
           <a:p xmlns:a="http://schemas.openxmlformats.org/drawingml/2006/main">
             <a:pPr>
+              <a:buNone/>
               <a:defRPr sz="1725" b="0">
                 <a:solidFill>
                   <a:srgbClr val="B7C4D2"/>
@@ -3982,6 +3993,7 @@
           <a:lstStyle xmlns:a="http://schemas.openxmlformats.org/drawingml/2006/main"/>
           <a:p xmlns:a="http://schemas.openxmlformats.org/drawingml/2006/main">
             <a:pPr>
+              <a:buNone/>
               <a:defRPr sz="1275" b="0">
                 <a:solidFill>
                   <a:srgbClr val="B7C4D2"/>
@@ -4007,7 +4019,7 @@
       </p:sp>
       <p:graphicFrame>
         <p:nvGraphicFramePr>
-          <p:cNvPr id="11" name=""/>
+          <p:cNvPr id="13" name=""/>
           <p:cNvGraphicFramePr/>
           <p:nvPr/>
         </p:nvGraphicFramePr>
@@ -4487,6 +4499,7 @@
           <a:lstStyle xmlns:a="http://schemas.openxmlformats.org/drawingml/2006/main"/>
           <a:p xmlns:a="http://schemas.openxmlformats.org/drawingml/2006/main">
             <a:pPr>
+              <a:buNone/>
               <a:defRPr sz="4650" b="1">
                 <a:solidFill>
                   <a:srgbClr val="D4B57B"/>
@@ -4544,6 +4557,7 @@
           <a:lstStyle xmlns:a="http://schemas.openxmlformats.org/drawingml/2006/main"/>
           <a:p xmlns:a="http://schemas.openxmlformats.org/drawingml/2006/main">
             <a:pPr>
+              <a:buNone/>
               <a:defRPr sz="1950" b="0">
                 <a:solidFill>
                   <a:srgbClr val="F1F3F5"/>
@@ -4567,6 +4581,7 @@
           </a:p>
           <a:p xmlns:a="http://schemas.openxmlformats.org/drawingml/2006/main">
             <a:pPr>
+              <a:buNone/>
               <a:defRPr sz="1950" b="0">
                 <a:solidFill>
                   <a:srgbClr val="F1F3F5"/>
@@ -4624,6 +4639,7 @@
           <a:lstStyle xmlns:a="http://schemas.openxmlformats.org/drawingml/2006/main"/>
           <a:p xmlns:a="http://schemas.openxmlformats.org/drawingml/2006/main">
             <a:pPr>
+              <a:buNone/>
               <a:defRPr sz="1275" b="0">
                 <a:solidFill>
                   <a:srgbClr val="B7C4D2"/>
@@ -4710,6 +4726,7 @@
           <a:lstStyle xmlns:a="http://schemas.openxmlformats.org/drawingml/2006/main"/>
           <a:p xmlns:a="http://schemas.openxmlformats.org/drawingml/2006/main">
             <a:pPr>
+              <a:buNone/>
               <a:defRPr sz="3300" b="1">
                 <a:solidFill>
                   <a:srgbClr val="F1F3F5"/>
@@ -4767,6 +4784,7 @@
           <a:lstStyle xmlns:a="http://schemas.openxmlformats.org/drawingml/2006/main"/>
           <a:p xmlns:a="http://schemas.openxmlformats.org/drawingml/2006/main">
             <a:pPr>
+              <a:buNone/>
               <a:defRPr sz="1725" b="0">
                 <a:solidFill>
                   <a:srgbClr val="B7C4D2"/>
@@ -4824,6 +4842,7 @@
           <a:lstStyle xmlns:a="http://schemas.openxmlformats.org/drawingml/2006/main"/>
           <a:p xmlns:a="http://schemas.openxmlformats.org/drawingml/2006/main">
             <a:pPr>
+              <a:buNone/>
               <a:defRPr sz="1275" b="0">
                 <a:solidFill>
                   <a:srgbClr val="B7C4D2"/>
@@ -4881,6 +4900,7 @@
           <a:lstStyle xmlns:a="http://schemas.openxmlformats.org/drawingml/2006/main"/>
           <a:p xmlns:a="http://schemas.openxmlformats.org/drawingml/2006/main">
             <a:pPr>
+              <a:buNone/>
               <a:defRPr sz="5250" b="1">
                 <a:solidFill>
                   <a:srgbClr val="D4B57B"/>
@@ -4938,6 +4958,7 @@
           <a:lstStyle xmlns:a="http://schemas.openxmlformats.org/drawingml/2006/main"/>
           <a:p xmlns:a="http://schemas.openxmlformats.org/drawingml/2006/main">
             <a:pPr>
+              <a:buNone/>
               <a:defRPr sz="1875" b="0">
                 <a:solidFill>
                   <a:srgbClr val="B7C4D2"/>
@@ -4995,6 +5016,7 @@
           <a:lstStyle xmlns:a="http://schemas.openxmlformats.org/drawingml/2006/main"/>
           <a:p xmlns:a="http://schemas.openxmlformats.org/drawingml/2006/main">
             <a:pPr>
+              <a:buNone/>
               <a:defRPr sz="2100" b="0">
                 <a:solidFill>
                   <a:srgbClr val="F1F3F5"/>
@@ -5018,6 +5040,7 @@
           </a:p>
           <a:p xmlns:a="http://schemas.openxmlformats.org/drawingml/2006/main">
             <a:pPr>
+              <a:buNone/>
               <a:defRPr sz="2100" b="0">
                 <a:solidFill>
                   <a:srgbClr val="F1F3F5"/>
@@ -5041,6 +5064,7 @@
           </a:p>
           <a:p xmlns:a="http://schemas.openxmlformats.org/drawingml/2006/main">
             <a:pPr>
+              <a:buNone/>
               <a:defRPr sz="2100" b="0">
                 <a:solidFill>
                   <a:srgbClr val="F1F3F5"/>
@@ -5098,6 +5122,7 @@
           <a:lstStyle xmlns:a="http://schemas.openxmlformats.org/drawingml/2006/main"/>
           <a:p xmlns:a="http://schemas.openxmlformats.org/drawingml/2006/main">
             <a:pPr>
+              <a:buNone/>
               <a:defRPr sz="1950" b="1">
                 <a:solidFill>
                   <a:srgbClr val="F1F3F5"/>
@@ -5155,6 +5180,7 @@
           <a:lstStyle xmlns:a="http://schemas.openxmlformats.org/drawingml/2006/main"/>
           <a:p xmlns:a="http://schemas.openxmlformats.org/drawingml/2006/main">
             <a:pPr>
+              <a:buNone/>
               <a:defRPr sz="1950" b="1">
                 <a:solidFill>
                   <a:srgbClr val="F1F3F5"/>
@@ -5212,6 +5238,7 @@
           <a:lstStyle xmlns:a="http://schemas.openxmlformats.org/drawingml/2006/main"/>
           <a:p xmlns:a="http://schemas.openxmlformats.org/drawingml/2006/main">
             <a:pPr>
+              <a:buNone/>
               <a:defRPr sz="1950" b="1">
                 <a:solidFill>
                   <a:srgbClr val="F1F3F5"/>
@@ -5269,6 +5296,7 @@
           <a:lstStyle xmlns:a="http://schemas.openxmlformats.org/drawingml/2006/main"/>
           <a:p xmlns:a="http://schemas.openxmlformats.org/drawingml/2006/main">
             <a:pPr>
+              <a:buNone/>
               <a:defRPr sz="1950" b="0">
                 <a:solidFill>
                   <a:srgbClr val="B7C4D2"/>
@@ -5292,6 +5320,7 @@
           </a:p>
           <a:p xmlns:a="http://schemas.openxmlformats.org/drawingml/2006/main">
             <a:pPr>
+              <a:buNone/>
               <a:defRPr sz="1950" b="0">
                 <a:solidFill>
                   <a:srgbClr val="B7C4D2"/>
@@ -5378,6 +5407,7 @@
           <a:lstStyle xmlns:a="http://schemas.openxmlformats.org/drawingml/2006/main"/>
           <a:p xmlns:a="http://schemas.openxmlformats.org/drawingml/2006/main">
             <a:pPr>
+              <a:buNone/>
               <a:defRPr sz="3300" b="1">
                 <a:solidFill>
                   <a:srgbClr val="F1F3F5"/>
@@ -5435,6 +5465,7 @@
           <a:lstStyle xmlns:a="http://schemas.openxmlformats.org/drawingml/2006/main"/>
           <a:p xmlns:a="http://schemas.openxmlformats.org/drawingml/2006/main">
             <a:pPr>
+              <a:buNone/>
               <a:defRPr sz="1725" b="0">
                 <a:solidFill>
                   <a:srgbClr val="B7C4D2"/>
@@ -5492,6 +5523,7 @@
           <a:lstStyle xmlns:a="http://schemas.openxmlformats.org/drawingml/2006/main"/>
           <a:p xmlns:a="http://schemas.openxmlformats.org/drawingml/2006/main">
             <a:pPr>
+              <a:buNone/>
               <a:defRPr sz="1275" b="0">
                 <a:solidFill>
                   <a:srgbClr val="B7C4D2"/>
@@ -5549,6 +5581,7 @@
           <a:lstStyle xmlns:a="http://schemas.openxmlformats.org/drawingml/2006/main"/>
           <a:p xmlns:a="http://schemas.openxmlformats.org/drawingml/2006/main">
             <a:pPr>
+              <a:buNone/>
               <a:defRPr sz="3300" b="1">
                 <a:solidFill>
                   <a:srgbClr val="F1F3F5"/>
@@ -5572,6 +5605,7 @@
           </a:p>
           <a:p xmlns:a="http://schemas.openxmlformats.org/drawingml/2006/main">
             <a:pPr>
+              <a:buNone/>
               <a:defRPr sz="3300" b="1">
                 <a:solidFill>
                   <a:srgbClr val="F1F3F5"/>
@@ -5629,6 +5663,7 @@
           <a:lstStyle xmlns:a="http://schemas.openxmlformats.org/drawingml/2006/main"/>
           <a:p xmlns:a="http://schemas.openxmlformats.org/drawingml/2006/main">
             <a:pPr>
+              <a:buNone/>
               <a:defRPr sz="2175" b="0">
                 <a:solidFill>
                   <a:srgbClr val="B7C4D2"/>
@@ -5652,6 +5687,7 @@
           </a:p>
           <a:p xmlns:a="http://schemas.openxmlformats.org/drawingml/2006/main">
             <a:pPr>
+              <a:buNone/>
               <a:defRPr sz="2175" b="0">
                 <a:solidFill>
                   <a:srgbClr val="B7C4D2"/>
@@ -5709,6 +5745,7 @@
           <a:lstStyle xmlns:a="http://schemas.openxmlformats.org/drawingml/2006/main"/>
           <a:p xmlns:a="http://schemas.openxmlformats.org/drawingml/2006/main">
             <a:pPr>
+              <a:buNone/>
               <a:defRPr sz="2175" b="1">
                 <a:solidFill>
                   <a:srgbClr val="D4B57B"/>
@@ -5766,6 +5803,7 @@
           <a:lstStyle xmlns:a="http://schemas.openxmlformats.org/drawingml/2006/main"/>
           <a:p xmlns:a="http://schemas.openxmlformats.org/drawingml/2006/main">
             <a:pPr>
+              <a:buNone/>
               <a:defRPr sz="2100" b="0">
                 <a:solidFill>
                   <a:srgbClr val="F1F3F5"/>
@@ -5789,6 +5827,7 @@
           </a:p>
           <a:p xmlns:a="http://schemas.openxmlformats.org/drawingml/2006/main">
             <a:pPr>
+              <a:buNone/>
               <a:defRPr sz="2100" b="0">
                 <a:solidFill>
                   <a:srgbClr val="F1F3F5"/>
@@ -5812,6 +5851,7 @@
           </a:p>
           <a:p xmlns:a="http://schemas.openxmlformats.org/drawingml/2006/main">
             <a:pPr>
+              <a:buNone/>
               <a:defRPr sz="2100" b="0">
                 <a:solidFill>
                   <a:srgbClr val="F1F3F5"/>
@@ -5835,6 +5875,7 @@
           </a:p>
           <a:p xmlns:a="http://schemas.openxmlformats.org/drawingml/2006/main">
             <a:pPr>
+              <a:buNone/>
               <a:defRPr sz="2100" b="0">
                 <a:solidFill>
                   <a:srgbClr val="F1F3F5"/>
@@ -5892,6 +5933,7 @@
           <a:lstStyle xmlns:a="http://schemas.openxmlformats.org/drawingml/2006/main"/>
           <a:p xmlns:a="http://schemas.openxmlformats.org/drawingml/2006/main">
             <a:pPr>
+              <a:buNone/>
               <a:defRPr sz="1875" b="0">
                 <a:solidFill>
                   <a:srgbClr val="B7C4D2"/>
@@ -5978,6 +6020,7 @@
           <a:lstStyle xmlns:a="http://schemas.openxmlformats.org/drawingml/2006/main"/>
           <a:p xmlns:a="http://schemas.openxmlformats.org/drawingml/2006/main">
             <a:pPr>
+              <a:buNone/>
               <a:defRPr sz="3300" b="1">
                 <a:solidFill>
                   <a:srgbClr val="F1F3F5"/>
@@ -5996,7 +6039,7 @@
                 <a:ea typeface="Helvetica Neue"/>
                 <a:cs typeface="Helvetica Neue"/>
               </a:rPr>
-              <a:t>Comparativa de las mejores configuraciones</a:t>
+              <a:t>Baseline frente a Jchulvi v3</a:t>
             </a:r>
           </a:p>
         </p:txBody>
@@ -6035,6 +6078,7 @@
           <a:lstStyle xmlns:a="http://schemas.openxmlformats.org/drawingml/2006/main"/>
           <a:p xmlns:a="http://schemas.openxmlformats.org/drawingml/2006/main">
             <a:pPr>
+              <a:buNone/>
               <a:defRPr sz="1725" b="0">
                 <a:solidFill>
                   <a:srgbClr val="B7C4D2"/>
@@ -6053,7 +6097,7 @@
                 <a:ea typeface="Helvetica Neue"/>
                 <a:cs typeface="Helvetica Neue"/>
               </a:rPr>
-              <a:t>Mismas 20 preguntas del equipo. Medias por pregunta.</a:t>
+              <a:t>Mismas 20 preguntas del equipo · Métricas medias por pregunta</a:t>
             </a:r>
           </a:p>
         </p:txBody>
@@ -6092,6 +6136,7 @@
           <a:lstStyle xmlns:a="http://schemas.openxmlformats.org/drawingml/2006/main"/>
           <a:p xmlns:a="http://schemas.openxmlformats.org/drawingml/2006/main">
             <a:pPr>
+              <a:buNone/>
               <a:defRPr sz="1275" b="0">
                 <a:solidFill>
                   <a:srgbClr val="B7C4D2"/>
@@ -6115,666 +6160,6 @@
           </a:p>
         </p:txBody>
       </p:sp>
-      <p:graphicFrame>
-        <p:nvGraphicFramePr>
-          <p:cNvPr id="10" name=""/>
-          <p:cNvGraphicFramePr/>
-          <p:nvPr/>
-        </p:nvGraphicFramePr>
-        <p:xfrm>
-          <a:off xmlns:a="http://schemas.openxmlformats.org/drawingml/2006/main" x="609600" y="1895475"/>
-          <a:ext xmlns:a="http://schemas.openxmlformats.org/drawingml/2006/main" cx="10972800" cy="3314700"/>
-        </p:xfrm>
-        <a:graphic xmlns:a="http://schemas.openxmlformats.org/drawingml/2006/main">
-          <a:graphicData uri="http://schemas.openxmlformats.org/drawingml/2006/table">
-            <a:tbl>
-              <a:tblPr/>
-              <a:tblGrid>
-                <a:gridCol w="3028950"/>
-                <a:gridCol w="2647950"/>
-                <a:gridCol w="2647950"/>
-                <a:gridCol w="2647950"/>
-              </a:tblGrid>
-              <a:tr h="552450">
-                <a:tc>
-                  <a:txBody>
-                    <a:bodyPr>
-                      <a:noAutofit/>
-                    </a:bodyPr>
-                    <a:lstStyle/>
-                    <a:p>
-                      <a:r>
-                        <a:rPr sz="1725" b="1">
-                          <a:solidFill>
-                            <a:srgbClr val="B7C4D2"/>
-                          </a:solidFill>
-                          <a:latin typeface="Helvetica Neue"/>
-                          <a:ea typeface="Helvetica Neue"/>
-                          <a:cs typeface="Helvetica Neue"/>
-                        </a:rPr>
-                        <a:t/>
-                      </a:r>
-                    </a:p>
-                  </a:txBody>
-                  <a:tcPr marL="133350" marR="114300" marT="114300" marB="95250">
-                    <a:solidFill>
-                      <a:srgbClr val="0B1C32"/>
-                    </a:solidFill>
-                  </a:tcPr>
-                </a:tc>
-                <a:tc>
-                  <a:txBody>
-                    <a:bodyPr>
-                      <a:noAutofit/>
-                    </a:bodyPr>
-                    <a:lstStyle/>
-                    <a:p>
-                      <a:r>
-                        <a:rPr sz="1725" b="1">
-                          <a:solidFill>
-                            <a:srgbClr val="B7C4D2"/>
-                          </a:solidFill>
-                          <a:latin typeface="Helvetica Neue"/>
-                          <a:ea typeface="Helvetica Neue"/>
-                          <a:cs typeface="Helvetica Neue"/>
-                        </a:rPr>
-                        <a:t>Higinio · v018</a:t>
-                      </a:r>
-                    </a:p>
-                  </a:txBody>
-                  <a:tcPr marL="133350" marR="114300" marT="114300" marB="95250">
-                    <a:solidFill>
-                      <a:srgbClr val="0B1C32"/>
-                    </a:solidFill>
-                  </a:tcPr>
-                </a:tc>
-                <a:tc>
-                  <a:txBody>
-                    <a:bodyPr>
-                      <a:noAutofit/>
-                    </a:bodyPr>
-                    <a:lstStyle/>
-                    <a:p>
-                      <a:r>
-                        <a:rPr sz="1725" b="1">
-                          <a:solidFill>
-                            <a:srgbClr val="B7C4D2"/>
-                          </a:solidFill>
-                          <a:latin typeface="Helvetica Neue"/>
-                          <a:ea typeface="Helvetica Neue"/>
-                          <a:cs typeface="Helvetica Neue"/>
-                        </a:rPr>
-                        <a:t>Hugo · v005</a:t>
-                      </a:r>
-                    </a:p>
-                  </a:txBody>
-                  <a:tcPr marL="133350" marR="114300" marT="114300" marB="95250">
-                    <a:solidFill>
-                      <a:srgbClr val="0B1C32"/>
-                    </a:solidFill>
-                  </a:tcPr>
-                </a:tc>
-                <a:tc>
-                  <a:txBody>
-                    <a:bodyPr>
-                      <a:noAutofit/>
-                    </a:bodyPr>
-                    <a:lstStyle/>
-                    <a:p>
-                      <a:r>
-                        <a:rPr sz="1725" b="1">
-                          <a:solidFill>
-                            <a:srgbClr val="B7C4D2"/>
-                          </a:solidFill>
-                          <a:latin typeface="Helvetica Neue"/>
-                          <a:ea typeface="Helvetica Neue"/>
-                          <a:cs typeface="Helvetica Neue"/>
-                        </a:rPr>
-                        <a:t>Javier · v3</a:t>
-                      </a:r>
-                    </a:p>
-                  </a:txBody>
-                  <a:tcPr marL="133350" marR="114300" marT="114300" marB="95250">
-                    <a:solidFill>
-                      <a:srgbClr val="0B1C32"/>
-                    </a:solidFill>
-                  </a:tcPr>
-                </a:tc>
-              </a:tr>
-              <a:tr h="552450">
-                <a:tc>
-                  <a:txBody>
-                    <a:bodyPr>
-                      <a:noAutofit/>
-                    </a:bodyPr>
-                    <a:lstStyle/>
-                    <a:p>
-                      <a:r>
-                        <a:rPr sz="1725" b="1">
-                          <a:solidFill>
-                            <a:srgbClr val="F1F3F5"/>
-                          </a:solidFill>
-                          <a:latin typeface="Helvetica Neue"/>
-                          <a:ea typeface="Helvetica Neue"/>
-                          <a:cs typeface="Helvetica Neue"/>
-                        </a:rPr>
-                        <a:t>LLM</a:t>
-                      </a:r>
-                    </a:p>
-                  </a:txBody>
-                  <a:tcPr marL="133350" marR="114300" marT="114300" marB="95250">
-                    <a:solidFill>
-                      <a:srgbClr val="0B1C32"/>
-                    </a:solidFill>
-                  </a:tcPr>
-                </a:tc>
-                <a:tc>
-                  <a:txBody>
-                    <a:bodyPr>
-                      <a:noAutofit/>
-                    </a:bodyPr>
-                    <a:lstStyle/>
-                    <a:p>
-                      <a:r>
-                        <a:rPr sz="1725" b="0">
-                          <a:solidFill>
-                            <a:srgbClr val="F1F3F5"/>
-                          </a:solidFill>
-                          <a:latin typeface="Helvetica Neue"/>
-                          <a:ea typeface="Helvetica Neue"/>
-                          <a:cs typeface="Helvetica Neue"/>
-                        </a:rPr>
-                        <a:t>Gemini 3.8 Flash</a:t>
-                      </a:r>
-                    </a:p>
-                  </a:txBody>
-                  <a:tcPr marL="133350" marR="114300" marT="114300" marB="95250">
-                    <a:solidFill>
-                      <a:srgbClr val="0B1C32"/>
-                    </a:solidFill>
-                  </a:tcPr>
-                </a:tc>
-                <a:tc>
-                  <a:txBody>
-                    <a:bodyPr>
-                      <a:noAutofit/>
-                    </a:bodyPr>
-                    <a:lstStyle/>
-                    <a:p>
-                      <a:r>
-                        <a:rPr sz="1725" b="0">
-                          <a:solidFill>
-                            <a:srgbClr val="F1F3F5"/>
-                          </a:solidFill>
-                          <a:latin typeface="Helvetica Neue"/>
-                          <a:ea typeface="Helvetica Neue"/>
-                          <a:cs typeface="Helvetica Neue"/>
-                        </a:rPr>
-                        <a:t>Claude Sonnet 5</a:t>
-                      </a:r>
-                    </a:p>
-                  </a:txBody>
-                  <a:tcPr marL="133350" marR="114300" marT="114300" marB="95250">
-                    <a:solidFill>
-                      <a:srgbClr val="0B1C32"/>
-                    </a:solidFill>
-                  </a:tcPr>
-                </a:tc>
-                <a:tc>
-                  <a:txBody>
-                    <a:bodyPr>
-                      <a:noAutofit/>
-                    </a:bodyPr>
-                    <a:lstStyle/>
-                    <a:p>
-                      <a:r>
-                        <a:rPr sz="1725" b="0">
-                          <a:solidFill>
-                            <a:srgbClr val="F1F3F5"/>
-                          </a:solidFill>
-                          <a:latin typeface="Helvetica Neue"/>
-                          <a:ea typeface="Helvetica Neue"/>
-                          <a:cs typeface="Helvetica Neue"/>
-                        </a:rPr>
-                        <a:t>DeepSeek V4 Flash</a:t>
-                      </a:r>
-                    </a:p>
-                  </a:txBody>
-                  <a:tcPr marL="133350" marR="114300" marT="114300" marB="95250">
-                    <a:solidFill>
-                      <a:srgbClr val="0B1C32"/>
-                    </a:solidFill>
-                  </a:tcPr>
-                </a:tc>
-              </a:tr>
-              <a:tr h="552450">
-                <a:tc>
-                  <a:txBody>
-                    <a:bodyPr>
-                      <a:noAutofit/>
-                    </a:bodyPr>
-                    <a:lstStyle/>
-                    <a:p>
-                      <a:r>
-                        <a:rPr sz="1725" b="1">
-                          <a:solidFill>
-                            <a:srgbClr val="F1F3F5"/>
-                          </a:solidFill>
-                          <a:latin typeface="Helvetica Neue"/>
-                          <a:ea typeface="Helvetica Neue"/>
-                          <a:cs typeface="Helvetica Neue"/>
-                        </a:rPr>
-                        <a:t>Embeddings</a:t>
-                      </a:r>
-                    </a:p>
-                  </a:txBody>
-                  <a:tcPr marL="133350" marR="114300" marT="114300" marB="95250">
-                    <a:solidFill>
-                      <a:srgbClr val="0B1C32"/>
-                    </a:solidFill>
-                  </a:tcPr>
-                </a:tc>
-                <a:tc>
-                  <a:txBody>
-                    <a:bodyPr>
-                      <a:noAutofit/>
-                    </a:bodyPr>
-                    <a:lstStyle/>
-                    <a:p>
-                      <a:r>
-                        <a:rPr sz="1725" b="0">
-                          <a:solidFill>
-                            <a:srgbClr val="F1F3F5"/>
-                          </a:solidFill>
-                          <a:latin typeface="Helvetica Neue"/>
-                          <a:ea typeface="Helvetica Neue"/>
-                          <a:cs typeface="Helvetica Neue"/>
-                        </a:rPr>
-                        <a:t>BGE-small-en-v1.5</a:t>
-                      </a:r>
-                    </a:p>
-                  </a:txBody>
-                  <a:tcPr marL="133350" marR="114300" marT="114300" marB="95250">
-                    <a:solidFill>
-                      <a:srgbClr val="0B1C32"/>
-                    </a:solidFill>
-                  </a:tcPr>
-                </a:tc>
-                <a:tc>
-                  <a:txBody>
-                    <a:bodyPr>
-                      <a:noAutofit/>
-                    </a:bodyPr>
-                    <a:lstStyle/>
-                    <a:p>
-                      <a:r>
-                        <a:rPr sz="1725" b="0">
-                          <a:solidFill>
-                            <a:srgbClr val="F1F3F5"/>
-                          </a:solidFill>
-                          <a:latin typeface="Helvetica Neue"/>
-                          <a:ea typeface="Helvetica Neue"/>
-                          <a:cs typeface="Helvetica Neue"/>
-                        </a:rPr>
-                        <a:t>BGE-small-en-v1.5</a:t>
-                      </a:r>
-                    </a:p>
-                  </a:txBody>
-                  <a:tcPr marL="133350" marR="114300" marT="114300" marB="95250">
-                    <a:solidFill>
-                      <a:srgbClr val="0B1C32"/>
-                    </a:solidFill>
-                  </a:tcPr>
-                </a:tc>
-                <a:tc>
-                  <a:txBody>
-                    <a:bodyPr>
-                      <a:noAutofit/>
-                    </a:bodyPr>
-                    <a:lstStyle/>
-                    <a:p>
-                      <a:r>
-                        <a:rPr sz="1725" b="0">
-                          <a:solidFill>
-                            <a:srgbClr val="F1F3F5"/>
-                          </a:solidFill>
-                          <a:latin typeface="Helvetica Neue"/>
-                          <a:ea typeface="Helvetica Neue"/>
-                          <a:cs typeface="Helvetica Neue"/>
-                        </a:rPr>
-                        <a:t>Voyage 4 Lite</a:t>
-                      </a:r>
-                    </a:p>
-                  </a:txBody>
-                  <a:tcPr marL="133350" marR="114300" marT="114300" marB="95250">
-                    <a:solidFill>
-                      <a:srgbClr val="0B1C32"/>
-                    </a:solidFill>
-                  </a:tcPr>
-                </a:tc>
-              </a:tr>
-              <a:tr h="552450">
-                <a:tc>
-                  <a:txBody>
-                    <a:bodyPr>
-                      <a:noAutofit/>
-                    </a:bodyPr>
-                    <a:lstStyle/>
-                    <a:p>
-                      <a:r>
-                        <a:rPr sz="1725" b="1">
-                          <a:solidFill>
-                            <a:srgbClr val="F1F3F5"/>
-                          </a:solidFill>
-                          <a:latin typeface="Helvetica Neue"/>
-                          <a:ea typeface="Helvetica Neue"/>
-                          <a:cs typeface="Helvetica Neue"/>
-                        </a:rPr>
-                        <a:t>Aciertos</a:t>
-                      </a:r>
-                    </a:p>
-                  </a:txBody>
-                  <a:tcPr marL="133350" marR="114300" marT="114300" marB="95250">
-                    <a:solidFill>
-                      <a:srgbClr val="0B1C32"/>
-                    </a:solidFill>
-                  </a:tcPr>
-                </a:tc>
-                <a:tc>
-                  <a:txBody>
-                    <a:bodyPr>
-                      <a:noAutofit/>
-                    </a:bodyPr>
-                    <a:lstStyle/>
-                    <a:p>
-                      <a:r>
-                        <a:rPr sz="1725" b="0">
-                          <a:solidFill>
-                            <a:srgbClr val="F1F3F5"/>
-                          </a:solidFill>
-                          <a:latin typeface="Helvetica Neue"/>
-                          <a:ea typeface="Helvetica Neue"/>
-                          <a:cs typeface="Helvetica Neue"/>
-                        </a:rPr>
-                        <a:t>20/20</a:t>
-                      </a:r>
-                    </a:p>
-                  </a:txBody>
-                  <a:tcPr marL="133350" marR="114300" marT="114300" marB="95250">
-                    <a:solidFill>
-                      <a:srgbClr val="0B1C32"/>
-                    </a:solidFill>
-                  </a:tcPr>
-                </a:tc>
-                <a:tc>
-                  <a:txBody>
-                    <a:bodyPr>
-                      <a:noAutofit/>
-                    </a:bodyPr>
-                    <a:lstStyle/>
-                    <a:p>
-                      <a:r>
-                        <a:rPr sz="1725" b="0">
-                          <a:solidFill>
-                            <a:srgbClr val="F1F3F5"/>
-                          </a:solidFill>
-                          <a:latin typeface="Helvetica Neue"/>
-                          <a:ea typeface="Helvetica Neue"/>
-                          <a:cs typeface="Helvetica Neue"/>
-                        </a:rPr>
-                        <a:t>20/20</a:t>
-                      </a:r>
-                    </a:p>
-                  </a:txBody>
-                  <a:tcPr marL="133350" marR="114300" marT="114300" marB="95250">
-                    <a:solidFill>
-                      <a:srgbClr val="0B1C32"/>
-                    </a:solidFill>
-                  </a:tcPr>
-                </a:tc>
-                <a:tc>
-                  <a:txBody>
-                    <a:bodyPr>
-                      <a:noAutofit/>
-                    </a:bodyPr>
-                    <a:lstStyle/>
-                    <a:p>
-                      <a:r>
-                        <a:rPr sz="1725" b="0">
-                          <a:solidFill>
-                            <a:srgbClr val="F1F3F5"/>
-                          </a:solidFill>
-                          <a:latin typeface="Helvetica Neue"/>
-                          <a:ea typeface="Helvetica Neue"/>
-                          <a:cs typeface="Helvetica Neue"/>
-                        </a:rPr>
-                        <a:t>20/20</a:t>
-                      </a:r>
-                    </a:p>
-                  </a:txBody>
-                  <a:tcPr marL="133350" marR="114300" marT="114300" marB="95250">
-                    <a:solidFill>
-                      <a:srgbClr val="0B1C32"/>
-                    </a:solidFill>
-                  </a:tcPr>
-                </a:tc>
-              </a:tr>
-              <a:tr h="552450">
-                <a:tc>
-                  <a:txBody>
-                    <a:bodyPr>
-                      <a:noAutofit/>
-                    </a:bodyPr>
-                    <a:lstStyle/>
-                    <a:p>
-                      <a:r>
-                        <a:rPr sz="1725" b="1">
-                          <a:solidFill>
-                            <a:srgbClr val="F1F3F5"/>
-                          </a:solidFill>
-                          <a:latin typeface="Helvetica Neue"/>
-                          <a:ea typeface="Helvetica Neue"/>
-                          <a:cs typeface="Helvetica Neue"/>
-                        </a:rPr>
-                        <a:t>Coste (USD)</a:t>
-                      </a:r>
-                    </a:p>
-                  </a:txBody>
-                  <a:tcPr marL="133350" marR="114300" marT="114300" marB="95250">
-                    <a:solidFill>
-                      <a:srgbClr val="0B1C32"/>
-                    </a:solidFill>
-                  </a:tcPr>
-                </a:tc>
-                <a:tc>
-                  <a:txBody>
-                    <a:bodyPr>
-                      <a:noAutofit/>
-                    </a:bodyPr>
-                    <a:lstStyle/>
-                    <a:p>
-                      <a:r>
-                        <a:rPr sz="1725" b="0">
-                          <a:solidFill>
-                            <a:srgbClr val="F1F3F5"/>
-                          </a:solidFill>
-                          <a:latin typeface="Helvetica Neue"/>
-                          <a:ea typeface="Helvetica Neue"/>
-                          <a:cs typeface="Helvetica Neue"/>
-                        </a:rPr>
-                        <a:t>0,00835</a:t>
-                      </a:r>
-                    </a:p>
-                  </a:txBody>
-                  <a:tcPr marL="133350" marR="114300" marT="114300" marB="95250">
-                    <a:solidFill>
-                      <a:srgbClr val="0B1C32"/>
-                    </a:solidFill>
-                  </a:tcPr>
-                </a:tc>
-                <a:tc>
-                  <a:txBody>
-                    <a:bodyPr>
-                      <a:noAutofit/>
-                    </a:bodyPr>
-                    <a:lstStyle/>
-                    <a:p>
-                      <a:r>
-                        <a:rPr sz="1725" b="0">
-                          <a:solidFill>
-                            <a:srgbClr val="F1F3F5"/>
-                          </a:solidFill>
-                          <a:latin typeface="Helvetica Neue"/>
-                          <a:ea typeface="Helvetica Neue"/>
-                          <a:cs typeface="Helvetica Neue"/>
-                        </a:rPr>
-                        <a:t>0,0342</a:t>
-                      </a:r>
-                    </a:p>
-                  </a:txBody>
-                  <a:tcPr marL="133350" marR="114300" marT="114300" marB="95250">
-                    <a:solidFill>
-                      <a:srgbClr val="0B1C32"/>
-                    </a:solidFill>
-                  </a:tcPr>
-                </a:tc>
-                <a:tc>
-                  <a:txBody>
-                    <a:bodyPr>
-                      <a:noAutofit/>
-                    </a:bodyPr>
-                    <a:lstStyle/>
-                    <a:p>
-                      <a:r>
-                        <a:rPr sz="1725" b="0">
-                          <a:solidFill>
-                            <a:srgbClr val="F1F3F5"/>
-                          </a:solidFill>
-                          <a:latin typeface="Helvetica Neue"/>
-                          <a:ea typeface="Helvetica Neue"/>
-                          <a:cs typeface="Helvetica Neue"/>
-                        </a:rPr>
-                        <a:t>0,00124¹</a:t>
-                      </a:r>
-                    </a:p>
-                  </a:txBody>
-                  <a:tcPr marL="133350" marR="114300" marT="114300" marB="95250">
-                    <a:solidFill>
-                      <a:srgbClr val="0B1C32"/>
-                    </a:solidFill>
-                  </a:tcPr>
-                </a:tc>
-              </a:tr>
-              <a:tr h="552450">
-                <a:tc>
-                  <a:txBody>
-                    <a:bodyPr>
-                      <a:noAutofit/>
-                    </a:bodyPr>
-                    <a:lstStyle/>
-                    <a:p>
-                      <a:r>
-                        <a:rPr sz="1725" b="1">
-                          <a:solidFill>
-                            <a:srgbClr val="F1F3F5"/>
-                          </a:solidFill>
-                          <a:latin typeface="Helvetica Neue"/>
-                          <a:ea typeface="Helvetica Neue"/>
-                          <a:cs typeface="Helvetica Neue"/>
-                        </a:rPr>
-                        <a:t>Latencia / herramientas</a:t>
-                      </a:r>
-                    </a:p>
-                  </a:txBody>
-                  <a:tcPr marL="133350" marR="114300" marT="114300" marB="95250">
-                    <a:solidFill>
-                      <a:srgbClr val="0B1C32"/>
-                    </a:solidFill>
-                  </a:tcPr>
-                </a:tc>
-                <a:tc>
-                  <a:txBody>
-                    <a:bodyPr>
-                      <a:noAutofit/>
-                    </a:bodyPr>
-                    <a:lstStyle/>
-                    <a:p>
-                      <a:r>
-                        <a:rPr sz="1725" b="0">
-                          <a:solidFill>
-                            <a:srgbClr val="F1F3F5"/>
-                          </a:solidFill>
-                          <a:latin typeface="Helvetica Neue"/>
-                          <a:ea typeface="Helvetica Neue"/>
-                          <a:cs typeface="Helvetica Neue"/>
-                        </a:rPr>
-                        <a:t>14,92 s / 2,50</a:t>
-                      </a:r>
-                    </a:p>
-                  </a:txBody>
-                  <a:tcPr marL="133350" marR="114300" marT="114300" marB="95250">
-                    <a:solidFill>
-                      <a:srgbClr val="0B1C32"/>
-                    </a:solidFill>
-                  </a:tcPr>
-                </a:tc>
-                <a:tc>
-                  <a:txBody>
-                    <a:bodyPr>
-                      <a:noAutofit/>
-                    </a:bodyPr>
-                    <a:lstStyle/>
-                    <a:p>
-                      <a:r>
-                        <a:rPr sz="1725" b="0">
-                          <a:solidFill>
-                            <a:srgbClr val="F1F3F5"/>
-                          </a:solidFill>
-                          <a:latin typeface="Helvetica Neue"/>
-                          <a:ea typeface="Helvetica Neue"/>
-                          <a:cs typeface="Helvetica Neue"/>
-                        </a:rPr>
-                        <a:t>12,00 s / 2,75</a:t>
-                      </a:r>
-                    </a:p>
-                  </a:txBody>
-                  <a:tcPr marL="133350" marR="114300" marT="114300" marB="95250">
-                    <a:solidFill>
-                      <a:srgbClr val="0B1C32"/>
-                    </a:solidFill>
-                  </a:tcPr>
-                </a:tc>
-                <a:tc>
-                  <a:txBody>
-                    <a:bodyPr>
-                      <a:noAutofit/>
-                    </a:bodyPr>
-                    <a:lstStyle/>
-                    <a:p>
-                      <a:r>
-                        <a:rPr sz="1725" b="0">
-                          <a:solidFill>
-                            <a:srgbClr val="F1F3F5"/>
-                          </a:solidFill>
-                          <a:latin typeface="Helvetica Neue"/>
-                          <a:ea typeface="Helvetica Neue"/>
-                          <a:cs typeface="Helvetica Neue"/>
-                        </a:rPr>
-                        <a:t>18,21 s / 2,90</a:t>
-                      </a:r>
-                    </a:p>
-                  </a:txBody>
-                  <a:tcPr marL="133350" marR="114300" marT="114300" marB="95250">
-                    <a:solidFill>
-                      <a:srgbClr val="0B1C32"/>
-                    </a:solidFill>
-                  </a:tcPr>
-                </a:tc>
-              </a:tr>
-            </a:tbl>
-          </a:graphicData>
-        </a:graphic>
-      </p:graphicFrame>
       <p:sp>
         <p:nvSpPr>
           <p:cNvPr id="5" name="">
@@ -6791,8 +6176,8 @@
         </p:nvSpPr>
         <p:spPr>
           <a:xfrm xmlns:a="http://schemas.openxmlformats.org/drawingml/2006/main">
-            <a:off x="638175" y="5514975"/>
-            <a:ext cx="10858500" cy="666750"/>
+            <a:off x="638175" y="5695950"/>
+            <a:ext cx="10382250" cy="428625"/>
           </a:xfrm>
           <a:prstGeom xmlns:a="http://schemas.openxmlformats.org/drawingml/2006/main" prst="rect">
             <a:avLst/>
@@ -6809,6 +6194,7 @@
           <a:lstStyle xmlns:a="http://schemas.openxmlformats.org/drawingml/2006/main"/>
           <a:p xmlns:a="http://schemas.openxmlformats.org/drawingml/2006/main">
             <a:pPr>
+              <a:buNone/>
               <a:defRPr sz="2175" b="1">
                 <a:solidFill>
                   <a:srgbClr val="D4B57B"/>
@@ -6827,7 +6213,7 @@
                 <a:ea typeface="Helvetica Neue"/>
                 <a:cs typeface="Helvetica Neue"/>
               </a:rPr>
-              <a:t>Empate en acierto. Hugo fue más rápido. Javier registró menor coste.</a:t>
+              <a:t>Jchulvi v3: 20/20 frente a 11/20 y un 83,7 % menos de coste.</a:t>
             </a:r>
           </a:p>
         </p:txBody>
@@ -6866,6 +6252,7 @@
           <a:lstStyle xmlns:a="http://schemas.openxmlformats.org/drawingml/2006/main"/>
           <a:p xmlns:a="http://schemas.openxmlformats.org/drawingml/2006/main">
             <a:pPr>
+              <a:buNone/>
               <a:defRPr sz="1275" b="0">
                 <a:solidFill>
                   <a:srgbClr val="B7C4D2"/>
@@ -6884,11 +6271,848 @@
                 <a:ea typeface="Helvetica Neue"/>
                 <a:cs typeface="Helvetica Neue"/>
               </a:rPr>
-              <a:t>¹ Excluye embeddings de consulta. Hugo: cifras del README. Pasadas distintas, sin aislar el efecto del LLM.</a:t>
+              <a:t>Fuente: resultados/resumen_baseline.csv y resultados/resumen_jchulvi_v3.csv</a:t>
             </a:r>
           </a:p>
         </p:txBody>
       </p:sp>
+      <p:graphicFrame>
+        <p:nvGraphicFramePr>
+          <p:cNvPr id="14" name=""/>
+          <p:cNvGraphicFramePr/>
+          <p:nvPr/>
+        </p:nvGraphicFramePr>
+        <p:xfrm>
+          <a:off xmlns:a="http://schemas.openxmlformats.org/drawingml/2006/main" x="609600" y="1657350"/>
+          <a:ext xmlns:a="http://schemas.openxmlformats.org/drawingml/2006/main" cx="10972800" cy="3943350"/>
+        </p:xfrm>
+        <a:graphic xmlns:a="http://schemas.openxmlformats.org/drawingml/2006/main">
+          <a:graphicData uri="http://schemas.openxmlformats.org/drawingml/2006/table">
+            <a:tbl>
+              <a:tblPr/>
+              <a:tblGrid>
+                <a:gridCol w="4762500"/>
+                <a:gridCol w="3105150"/>
+                <a:gridCol w="3105150"/>
+              </a:tblGrid>
+              <a:tr h="381000">
+                <a:tc>
+                  <a:txBody>
+                    <a:bodyPr/>
+                    <a:lstStyle/>
+                    <a:p>
+                      <a:r>
+                        <a:rPr sz="1500" b="1">
+                          <a:solidFill>
+                            <a:srgbClr val="B7C4D2"/>
+                          </a:solidFill>
+                          <a:latin typeface="Helvetica Neue"/>
+                          <a:ea typeface="Helvetica Neue"/>
+                          <a:cs typeface="Helvetica Neue"/>
+                        </a:rPr>
+                        <a:t>Métrica</a:t>
+                      </a:r>
+                    </a:p>
+                  </a:txBody>
+                  <a:tcPr marL="114300" marR="114300" marT="28575" marB="28575" anchor="ctr">
+                    <a:solidFill>
+                      <a:srgbClr val="0B1C32"/>
+                    </a:solidFill>
+                  </a:tcPr>
+                </a:tc>
+                <a:tc>
+                  <a:txBody>
+                    <a:bodyPr/>
+                    <a:lstStyle/>
+                    <a:p>
+                      <a:r>
+                        <a:rPr sz="1500" b="1">
+                          <a:solidFill>
+                            <a:srgbClr val="B7C4D2"/>
+                          </a:solidFill>
+                          <a:latin typeface="Helvetica Neue"/>
+                          <a:ea typeface="Helvetica Neue"/>
+                          <a:cs typeface="Helvetica Neue"/>
+                        </a:rPr>
+                        <a:t>Baseline</a:t>
+                      </a:r>
+                    </a:p>
+                  </a:txBody>
+                  <a:tcPr marL="114300" marR="114300" marT="28575" marB="28575" anchor="ctr">
+                    <a:solidFill>
+                      <a:srgbClr val="0B1C32"/>
+                    </a:solidFill>
+                  </a:tcPr>
+                </a:tc>
+                <a:tc>
+                  <a:txBody>
+                    <a:bodyPr/>
+                    <a:lstStyle/>
+                    <a:p>
+                      <a:r>
+                        <a:rPr sz="1500" b="1">
+                          <a:solidFill>
+                            <a:srgbClr val="D4B57B"/>
+                          </a:solidFill>
+                          <a:latin typeface="Helvetica Neue"/>
+                          <a:ea typeface="Helvetica Neue"/>
+                          <a:cs typeface="Helvetica Neue"/>
+                        </a:rPr>
+                        <a:t>Jchulvi v3</a:t>
+                      </a:r>
+                    </a:p>
+                  </a:txBody>
+                  <a:tcPr marL="114300" marR="114300" marT="28575" marB="28575" anchor="ctr">
+                    <a:solidFill>
+                      <a:srgbClr val="0B1C32"/>
+                    </a:solidFill>
+                  </a:tcPr>
+                </a:tc>
+              </a:tr>
+              <a:tr h="356235">
+                <a:tc>
+                  <a:txBody>
+                    <a:bodyPr/>
+                    <a:lstStyle/>
+                    <a:p>
+                      <a:r>
+                        <a:rPr sz="1275" b="1">
+                          <a:solidFill>
+                            <a:srgbClr val="F1F3F5"/>
+                          </a:solidFill>
+                          <a:latin typeface="Helvetica Neue"/>
+                          <a:ea typeface="Helvetica Neue"/>
+                          <a:cs typeface="Helvetica Neue"/>
+                        </a:rPr>
+                        <a:t>Cita</a:t>
+                      </a:r>
+                    </a:p>
+                  </a:txBody>
+                  <a:tcPr marL="114300" marR="114300" marT="28575" marB="28575" anchor="ctr">
+                    <a:solidFill>
+                      <a:srgbClr val="0B1C32"/>
+                    </a:solidFill>
+                  </a:tcPr>
+                </a:tc>
+                <a:tc>
+                  <a:txBody>
+                    <a:bodyPr/>
+                    <a:lstStyle/>
+                    <a:p>
+                      <a:r>
+                        <a:rPr sz="1275" b="0">
+                          <a:solidFill>
+                            <a:srgbClr val="F1F3F5"/>
+                          </a:solidFill>
+                          <a:latin typeface="Helvetica Neue"/>
+                          <a:ea typeface="Helvetica Neue"/>
+                          <a:cs typeface="Helvetica Neue"/>
+                        </a:rPr>
+                        <a:t>42,9 %</a:t>
+                      </a:r>
+                    </a:p>
+                  </a:txBody>
+                  <a:tcPr marL="114300" marR="114300" marT="28575" marB="28575" anchor="ctr">
+                    <a:solidFill>
+                      <a:srgbClr val="0B1C32"/>
+                    </a:solidFill>
+                  </a:tcPr>
+                </a:tc>
+                <a:tc>
+                  <a:txBody>
+                    <a:bodyPr/>
+                    <a:lstStyle/>
+                    <a:p>
+                      <a:r>
+                        <a:rPr sz="1275" b="0">
+                          <a:solidFill>
+                            <a:srgbClr val="F1F3F5"/>
+                          </a:solidFill>
+                          <a:latin typeface="Helvetica Neue"/>
+                          <a:ea typeface="Helvetica Neue"/>
+                          <a:cs typeface="Helvetica Neue"/>
+                        </a:rPr>
+                        <a:t>100,0 %</a:t>
+                      </a:r>
+                    </a:p>
+                  </a:txBody>
+                  <a:tcPr marL="114300" marR="114300" marT="28575" marB="28575" anchor="ctr">
+                    <a:solidFill>
+                      <a:srgbClr val="0B1C32"/>
+                    </a:solidFill>
+                  </a:tcPr>
+                </a:tc>
+              </a:tr>
+              <a:tr h="356235">
+                <a:tc>
+                  <a:txBody>
+                    <a:bodyPr/>
+                    <a:lstStyle/>
+                    <a:p>
+                      <a:r>
+                        <a:rPr sz="1275" b="1">
+                          <a:solidFill>
+                            <a:srgbClr val="F1F3F5"/>
+                          </a:solidFill>
+                          <a:latin typeface="Helvetica Neue"/>
+                          <a:ea typeface="Helvetica Neue"/>
+                          <a:cs typeface="Helvetica Neue"/>
+                        </a:rPr>
+                        <a:t>Cifra</a:t>
+                      </a:r>
+                    </a:p>
+                  </a:txBody>
+                  <a:tcPr marL="114300" marR="114300" marT="28575" marB="28575" anchor="ctr">
+                    <a:solidFill>
+                      <a:srgbClr val="0B1C32"/>
+                    </a:solidFill>
+                  </a:tcPr>
+                </a:tc>
+                <a:tc>
+                  <a:txBody>
+                    <a:bodyPr/>
+                    <a:lstStyle/>
+                    <a:p>
+                      <a:r>
+                        <a:rPr sz="1275" b="0">
+                          <a:solidFill>
+                            <a:srgbClr val="F1F3F5"/>
+                          </a:solidFill>
+                          <a:latin typeface="Helvetica Neue"/>
+                          <a:ea typeface="Helvetica Neue"/>
+                          <a:cs typeface="Helvetica Neue"/>
+                        </a:rPr>
+                        <a:t>85,7 %</a:t>
+                      </a:r>
+                    </a:p>
+                  </a:txBody>
+                  <a:tcPr marL="114300" marR="114300" marT="28575" marB="28575" anchor="ctr">
+                    <a:solidFill>
+                      <a:srgbClr val="0B1C32"/>
+                    </a:solidFill>
+                  </a:tcPr>
+                </a:tc>
+                <a:tc>
+                  <a:txBody>
+                    <a:bodyPr/>
+                    <a:lstStyle/>
+                    <a:p>
+                      <a:r>
+                        <a:rPr sz="1275" b="0">
+                          <a:solidFill>
+                            <a:srgbClr val="F1F3F5"/>
+                          </a:solidFill>
+                          <a:latin typeface="Helvetica Neue"/>
+                          <a:ea typeface="Helvetica Neue"/>
+                          <a:cs typeface="Helvetica Neue"/>
+                        </a:rPr>
+                        <a:t>100,0 %</a:t>
+                      </a:r>
+                    </a:p>
+                  </a:txBody>
+                  <a:tcPr marL="114300" marR="114300" marT="28575" marB="28575" anchor="ctr">
+                    <a:solidFill>
+                      <a:srgbClr val="0B1C32"/>
+                    </a:solidFill>
+                  </a:tcPr>
+                </a:tc>
+              </a:tr>
+              <a:tr h="356235">
+                <a:tc>
+                  <a:txBody>
+                    <a:bodyPr/>
+                    <a:lstStyle/>
+                    <a:p>
+                      <a:r>
+                        <a:rPr sz="1275" b="1">
+                          <a:solidFill>
+                            <a:srgbClr val="F1F3F5"/>
+                          </a:solidFill>
+                          <a:latin typeface="Helvetica Neue"/>
+                          <a:ea typeface="Helvetica Neue"/>
+                          <a:cs typeface="Helvetica Neue"/>
+                        </a:rPr>
+                        <a:t>Trayectoria</a:t>
+                      </a:r>
+                    </a:p>
+                  </a:txBody>
+                  <a:tcPr marL="114300" marR="114300" marT="28575" marB="28575" anchor="ctr">
+                    <a:solidFill>
+                      <a:srgbClr val="0B1C32"/>
+                    </a:solidFill>
+                  </a:tcPr>
+                </a:tc>
+                <a:tc>
+                  <a:txBody>
+                    <a:bodyPr/>
+                    <a:lstStyle/>
+                    <a:p>
+                      <a:r>
+                        <a:rPr sz="1275" b="0">
+                          <a:solidFill>
+                            <a:srgbClr val="F1F3F5"/>
+                          </a:solidFill>
+                          <a:latin typeface="Helvetica Neue"/>
+                          <a:ea typeface="Helvetica Neue"/>
+                          <a:cs typeface="Helvetica Neue"/>
+                        </a:rPr>
+                        <a:t>75,0 %</a:t>
+                      </a:r>
+                    </a:p>
+                  </a:txBody>
+                  <a:tcPr marL="114300" marR="114300" marT="28575" marB="28575" anchor="ctr">
+                    <a:solidFill>
+                      <a:srgbClr val="0B1C32"/>
+                    </a:solidFill>
+                  </a:tcPr>
+                </a:tc>
+                <a:tc>
+                  <a:txBody>
+                    <a:bodyPr/>
+                    <a:lstStyle/>
+                    <a:p>
+                      <a:r>
+                        <a:rPr sz="1275" b="0">
+                          <a:solidFill>
+                            <a:srgbClr val="F1F3F5"/>
+                          </a:solidFill>
+                          <a:latin typeface="Helvetica Neue"/>
+                          <a:ea typeface="Helvetica Neue"/>
+                          <a:cs typeface="Helvetica Neue"/>
+                        </a:rPr>
+                        <a:t>100,0 %</a:t>
+                      </a:r>
+                    </a:p>
+                  </a:txBody>
+                  <a:tcPr marL="114300" marR="114300" marT="28575" marB="28575" anchor="ctr">
+                    <a:solidFill>
+                      <a:srgbClr val="0B1C32"/>
+                    </a:solidFill>
+                  </a:tcPr>
+                </a:tc>
+              </a:tr>
+              <a:tr h="356235">
+                <a:tc>
+                  <a:txBody>
+                    <a:bodyPr/>
+                    <a:lstStyle/>
+                    <a:p>
+                      <a:r>
+                        <a:rPr sz="1275" b="1">
+                          <a:solidFill>
+                            <a:srgbClr val="F1F3F5"/>
+                          </a:solidFill>
+                          <a:latin typeface="Helvetica Neue"/>
+                          <a:ea typeface="Helvetica Neue"/>
+                          <a:cs typeface="Helvetica Neue"/>
+                        </a:rPr>
+                        <a:t>Recall@5</a:t>
+                      </a:r>
+                    </a:p>
+                  </a:txBody>
+                  <a:tcPr marL="114300" marR="114300" marT="28575" marB="28575" anchor="ctr">
+                    <a:solidFill>
+                      <a:srgbClr val="0B1C32"/>
+                    </a:solidFill>
+                  </a:tcPr>
+                </a:tc>
+                <a:tc>
+                  <a:txBody>
+                    <a:bodyPr/>
+                    <a:lstStyle/>
+                    <a:p>
+                      <a:r>
+                        <a:rPr sz="1275" b="0">
+                          <a:solidFill>
+                            <a:srgbClr val="F1F3F5"/>
+                          </a:solidFill>
+                          <a:latin typeface="Helvetica Neue"/>
+                          <a:ea typeface="Helvetica Neue"/>
+                          <a:cs typeface="Helvetica Neue"/>
+                        </a:rPr>
+                        <a:t>42,9 %</a:t>
+                      </a:r>
+                    </a:p>
+                  </a:txBody>
+                  <a:tcPr marL="114300" marR="114300" marT="28575" marB="28575" anchor="ctr">
+                    <a:solidFill>
+                      <a:srgbClr val="0B1C32"/>
+                    </a:solidFill>
+                  </a:tcPr>
+                </a:tc>
+                <a:tc>
+                  <a:txBody>
+                    <a:bodyPr/>
+                    <a:lstStyle/>
+                    <a:p>
+                      <a:r>
+                        <a:rPr sz="1275" b="0">
+                          <a:solidFill>
+                            <a:srgbClr val="F1F3F5"/>
+                          </a:solidFill>
+                          <a:latin typeface="Helvetica Neue"/>
+                          <a:ea typeface="Helvetica Neue"/>
+                          <a:cs typeface="Helvetica Neue"/>
+                        </a:rPr>
+                        <a:t>85,7 %</a:t>
+                      </a:r>
+                    </a:p>
+                  </a:txBody>
+                  <a:tcPr marL="114300" marR="114300" marT="28575" marB="28575" anchor="ctr">
+                    <a:solidFill>
+                      <a:srgbClr val="0B1C32"/>
+                    </a:solidFill>
+                  </a:tcPr>
+                </a:tc>
+              </a:tr>
+              <a:tr h="356235">
+                <a:tc>
+                  <a:txBody>
+                    <a:bodyPr/>
+                    <a:lstStyle/>
+                    <a:p>
+                      <a:r>
+                        <a:rPr sz="1275" b="1">
+                          <a:solidFill>
+                            <a:srgbClr val="F1F3F5"/>
+                          </a:solidFill>
+                          <a:latin typeface="Helvetica Neue"/>
+                          <a:ea typeface="Helvetica Neue"/>
+                          <a:cs typeface="Helvetica Neue"/>
+                        </a:rPr>
+                        <a:t>Aciertos extractiva</a:t>
+                      </a:r>
+                    </a:p>
+                  </a:txBody>
+                  <a:tcPr marL="114300" marR="114300" marT="28575" marB="28575" anchor="ctr">
+                    <a:solidFill>
+                      <a:srgbClr val="0B1C32"/>
+                    </a:solidFill>
+                  </a:tcPr>
+                </a:tc>
+                <a:tc>
+                  <a:txBody>
+                    <a:bodyPr/>
+                    <a:lstStyle/>
+                    <a:p>
+                      <a:r>
+                        <a:rPr sz="1275" b="0">
+                          <a:solidFill>
+                            <a:srgbClr val="F1F3F5"/>
+                          </a:solidFill>
+                          <a:latin typeface="Helvetica Neue"/>
+                          <a:ea typeface="Helvetica Neue"/>
+                          <a:cs typeface="Helvetica Neue"/>
+                        </a:rPr>
+                        <a:t>5/6</a:t>
+                      </a:r>
+                    </a:p>
+                  </a:txBody>
+                  <a:tcPr marL="114300" marR="114300" marT="28575" marB="28575" anchor="ctr">
+                    <a:solidFill>
+                      <a:srgbClr val="0B1C32"/>
+                    </a:solidFill>
+                  </a:tcPr>
+                </a:tc>
+                <a:tc>
+                  <a:txBody>
+                    <a:bodyPr/>
+                    <a:lstStyle/>
+                    <a:p>
+                      <a:r>
+                        <a:rPr sz="1275" b="0">
+                          <a:solidFill>
+                            <a:srgbClr val="F1F3F5"/>
+                          </a:solidFill>
+                          <a:latin typeface="Helvetica Neue"/>
+                          <a:ea typeface="Helvetica Neue"/>
+                          <a:cs typeface="Helvetica Neue"/>
+                        </a:rPr>
+                        <a:t>6/6</a:t>
+                      </a:r>
+                    </a:p>
+                  </a:txBody>
+                  <a:tcPr marL="114300" marR="114300" marT="28575" marB="28575" anchor="ctr">
+                    <a:solidFill>
+                      <a:srgbClr val="0B1C32"/>
+                    </a:solidFill>
+                  </a:tcPr>
+                </a:tc>
+              </a:tr>
+              <a:tr h="356235">
+                <a:tc>
+                  <a:txBody>
+                    <a:bodyPr/>
+                    <a:lstStyle/>
+                    <a:p>
+                      <a:r>
+                        <a:rPr sz="1275" b="1">
+                          <a:solidFill>
+                            <a:srgbClr val="F1F3F5"/>
+                          </a:solidFill>
+                          <a:latin typeface="Helvetica Neue"/>
+                          <a:ea typeface="Helvetica Neue"/>
+                          <a:cs typeface="Helvetica Neue"/>
+                        </a:rPr>
+                        <a:t>Aciertos numérica</a:t>
+                      </a:r>
+                    </a:p>
+                  </a:txBody>
+                  <a:tcPr marL="114300" marR="114300" marT="28575" marB="28575" anchor="ctr">
+                    <a:solidFill>
+                      <a:srgbClr val="0B1C32"/>
+                    </a:solidFill>
+                  </a:tcPr>
+                </a:tc>
+                <a:tc>
+                  <a:txBody>
+                    <a:bodyPr/>
+                    <a:lstStyle/>
+                    <a:p>
+                      <a:r>
+                        <a:rPr sz="1275" b="0">
+                          <a:solidFill>
+                            <a:srgbClr val="F1F3F5"/>
+                          </a:solidFill>
+                          <a:latin typeface="Helvetica Neue"/>
+                          <a:ea typeface="Helvetica Neue"/>
+                          <a:cs typeface="Helvetica Neue"/>
+                        </a:rPr>
+                        <a:t>6/6</a:t>
+                      </a:r>
+                    </a:p>
+                  </a:txBody>
+                  <a:tcPr marL="114300" marR="114300" marT="28575" marB="28575" anchor="ctr">
+                    <a:solidFill>
+                      <a:srgbClr val="0B1C32"/>
+                    </a:solidFill>
+                  </a:tcPr>
+                </a:tc>
+                <a:tc>
+                  <a:txBody>
+                    <a:bodyPr/>
+                    <a:lstStyle/>
+                    <a:p>
+                      <a:r>
+                        <a:rPr sz="1275" b="0">
+                          <a:solidFill>
+                            <a:srgbClr val="F1F3F5"/>
+                          </a:solidFill>
+                          <a:latin typeface="Helvetica Neue"/>
+                          <a:ea typeface="Helvetica Neue"/>
+                          <a:cs typeface="Helvetica Neue"/>
+                        </a:rPr>
+                        <a:t>6/6</a:t>
+                      </a:r>
+                    </a:p>
+                  </a:txBody>
+                  <a:tcPr marL="114300" marR="114300" marT="28575" marB="28575" anchor="ctr">
+                    <a:solidFill>
+                      <a:srgbClr val="0B1C32"/>
+                    </a:solidFill>
+                  </a:tcPr>
+                </a:tc>
+              </a:tr>
+              <a:tr h="356235">
+                <a:tc>
+                  <a:txBody>
+                    <a:bodyPr/>
+                    <a:lstStyle/>
+                    <a:p>
+                      <a:r>
+                        <a:rPr sz="1275" b="1">
+                          <a:solidFill>
+                            <a:srgbClr val="F1F3F5"/>
+                          </a:solidFill>
+                          <a:latin typeface="Helvetica Neue"/>
+                          <a:ea typeface="Helvetica Neue"/>
+                          <a:cs typeface="Helvetica Neue"/>
+                        </a:rPr>
+                        <a:t>Aciertos comparativa</a:t>
+                      </a:r>
+                    </a:p>
+                  </a:txBody>
+                  <a:tcPr marL="114300" marR="114300" marT="28575" marB="28575" anchor="ctr">
+                    <a:solidFill>
+                      <a:srgbClr val="0B1C32"/>
+                    </a:solidFill>
+                  </a:tcPr>
+                </a:tc>
+                <a:tc>
+                  <a:txBody>
+                    <a:bodyPr/>
+                    <a:lstStyle/>
+                    <a:p>
+                      <a:r>
+                        <a:rPr sz="1275" b="0">
+                          <a:solidFill>
+                            <a:srgbClr val="F1F3F5"/>
+                          </a:solidFill>
+                          <a:latin typeface="Helvetica Neue"/>
+                          <a:ea typeface="Helvetica Neue"/>
+                          <a:cs typeface="Helvetica Neue"/>
+                        </a:rPr>
+                        <a:t>0/8</a:t>
+                      </a:r>
+                    </a:p>
+                  </a:txBody>
+                  <a:tcPr marL="114300" marR="114300" marT="28575" marB="28575" anchor="ctr">
+                    <a:solidFill>
+                      <a:srgbClr val="0B1C32"/>
+                    </a:solidFill>
+                  </a:tcPr>
+                </a:tc>
+                <a:tc>
+                  <a:txBody>
+                    <a:bodyPr/>
+                    <a:lstStyle/>
+                    <a:p>
+                      <a:r>
+                        <a:rPr sz="1275" b="0">
+                          <a:solidFill>
+                            <a:srgbClr val="F1F3F5"/>
+                          </a:solidFill>
+                          <a:latin typeface="Helvetica Neue"/>
+                          <a:ea typeface="Helvetica Neue"/>
+                          <a:cs typeface="Helvetica Neue"/>
+                        </a:rPr>
+                        <a:t>8/8</a:t>
+                      </a:r>
+                    </a:p>
+                  </a:txBody>
+                  <a:tcPr marL="114300" marR="114300" marT="28575" marB="28575" anchor="ctr">
+                    <a:solidFill>
+                      <a:srgbClr val="0B1C32"/>
+                    </a:solidFill>
+                  </a:tcPr>
+                </a:tc>
+              </a:tr>
+              <a:tr h="356235">
+                <a:tc>
+                  <a:txBody>
+                    <a:bodyPr/>
+                    <a:lstStyle/>
+                    <a:p>
+                      <a:r>
+                        <a:rPr sz="1275" b="1">
+                          <a:solidFill>
+                            <a:srgbClr val="F1F3F5"/>
+                          </a:solidFill>
+                          <a:latin typeface="Helvetica Neue"/>
+                          <a:ea typeface="Helvetica Neue"/>
+                          <a:cs typeface="Helvetica Neue"/>
+                        </a:rPr>
+                        <a:t>Coste medio (¢)</a:t>
+                      </a:r>
+                    </a:p>
+                  </a:txBody>
+                  <a:tcPr marL="114300" marR="114300" marT="28575" marB="28575" anchor="ctr">
+                    <a:solidFill>
+                      <a:srgbClr val="0B1C32"/>
+                    </a:solidFill>
+                  </a:tcPr>
+                </a:tc>
+                <a:tc>
+                  <a:txBody>
+                    <a:bodyPr/>
+                    <a:lstStyle/>
+                    <a:p>
+                      <a:r>
+                        <a:rPr sz="1275" b="0">
+                          <a:solidFill>
+                            <a:srgbClr val="F1F3F5"/>
+                          </a:solidFill>
+                          <a:latin typeface="Helvetica Neue"/>
+                          <a:ea typeface="Helvetica Neue"/>
+                          <a:cs typeface="Helvetica Neue"/>
+                        </a:rPr>
+                        <a:t>0,7592</a:t>
+                      </a:r>
+                    </a:p>
+                  </a:txBody>
+                  <a:tcPr marL="114300" marR="114300" marT="28575" marB="28575" anchor="ctr">
+                    <a:solidFill>
+                      <a:srgbClr val="0B1C32"/>
+                    </a:solidFill>
+                  </a:tcPr>
+                </a:tc>
+                <a:tc>
+                  <a:txBody>
+                    <a:bodyPr/>
+                    <a:lstStyle/>
+                    <a:p>
+                      <a:r>
+                        <a:rPr sz="1275" b="0">
+                          <a:solidFill>
+                            <a:srgbClr val="F1F3F5"/>
+                          </a:solidFill>
+                          <a:latin typeface="Helvetica Neue"/>
+                          <a:ea typeface="Helvetica Neue"/>
+                          <a:cs typeface="Helvetica Neue"/>
+                        </a:rPr>
+                        <a:t>0,1234</a:t>
+                      </a:r>
+                    </a:p>
+                  </a:txBody>
+                  <a:tcPr marL="114300" marR="114300" marT="28575" marB="28575" anchor="ctr">
+                    <a:solidFill>
+                      <a:srgbClr val="0B1C32"/>
+                    </a:solidFill>
+                  </a:tcPr>
+                </a:tc>
+              </a:tr>
+              <a:tr h="356235">
+                <a:tc>
+                  <a:txBody>
+                    <a:bodyPr/>
+                    <a:lstStyle/>
+                    <a:p>
+                      <a:r>
+                        <a:rPr sz="1275" b="1">
+                          <a:solidFill>
+                            <a:srgbClr val="F1F3F5"/>
+                          </a:solidFill>
+                          <a:latin typeface="Helvetica Neue"/>
+                          <a:ea typeface="Helvetica Neue"/>
+                          <a:cs typeface="Helvetica Neue"/>
+                        </a:rPr>
+                        <a:t>Latencia media (s)</a:t>
+                      </a:r>
+                    </a:p>
+                  </a:txBody>
+                  <a:tcPr marL="114300" marR="114300" marT="28575" marB="28575" anchor="ctr">
+                    <a:solidFill>
+                      <a:srgbClr val="0B1C32"/>
+                    </a:solidFill>
+                  </a:tcPr>
+                </a:tc>
+                <a:tc>
+                  <a:txBody>
+                    <a:bodyPr/>
+                    <a:lstStyle/>
+                    <a:p>
+                      <a:r>
+                        <a:rPr sz="1275" b="0">
+                          <a:solidFill>
+                            <a:srgbClr val="F1F3F5"/>
+                          </a:solidFill>
+                          <a:latin typeface="Helvetica Neue"/>
+                          <a:ea typeface="Helvetica Neue"/>
+                          <a:cs typeface="Helvetica Neue"/>
+                        </a:rPr>
+                        <a:t>14,87</a:t>
+                      </a:r>
+                    </a:p>
+                  </a:txBody>
+                  <a:tcPr marL="114300" marR="114300" marT="28575" marB="28575" anchor="ctr">
+                    <a:solidFill>
+                      <a:srgbClr val="0B1C32"/>
+                    </a:solidFill>
+                  </a:tcPr>
+                </a:tc>
+                <a:tc>
+                  <a:txBody>
+                    <a:bodyPr/>
+                    <a:lstStyle/>
+                    <a:p>
+                      <a:r>
+                        <a:rPr sz="1275" b="0">
+                          <a:solidFill>
+                            <a:srgbClr val="F1F3F5"/>
+                          </a:solidFill>
+                          <a:latin typeface="Helvetica Neue"/>
+                          <a:ea typeface="Helvetica Neue"/>
+                          <a:cs typeface="Helvetica Neue"/>
+                        </a:rPr>
+                        <a:t>16,34</a:t>
+                      </a:r>
+                    </a:p>
+                  </a:txBody>
+                  <a:tcPr marL="114300" marR="114300" marT="28575" marB="28575" anchor="ctr">
+                    <a:solidFill>
+                      <a:srgbClr val="0B1C32"/>
+                    </a:solidFill>
+                  </a:tcPr>
+                </a:tc>
+              </a:tr>
+              <a:tr h="356235">
+                <a:tc>
+                  <a:txBody>
+                    <a:bodyPr/>
+                    <a:lstStyle/>
+                    <a:p>
+                      <a:r>
+                        <a:rPr sz="1275" b="1">
+                          <a:solidFill>
+                            <a:srgbClr val="F1F3F5"/>
+                          </a:solidFill>
+                          <a:latin typeface="Helvetica Neue"/>
+                          <a:ea typeface="Helvetica Neue"/>
+                          <a:cs typeface="Helvetica Neue"/>
+                        </a:rPr>
+                        <a:t>Llamadas/pregunta</a:t>
+                      </a:r>
+                    </a:p>
+                  </a:txBody>
+                  <a:tcPr marL="114300" marR="114300" marT="28575" marB="28575" anchor="ctr">
+                    <a:solidFill>
+                      <a:srgbClr val="0B1C32"/>
+                    </a:solidFill>
+                  </a:tcPr>
+                </a:tc>
+                <a:tc>
+                  <a:txBody>
+                    <a:bodyPr/>
+                    <a:lstStyle/>
+                    <a:p>
+                      <a:r>
+                        <a:rPr sz="1275" b="0">
+                          <a:solidFill>
+                            <a:srgbClr val="F1F3F5"/>
+                          </a:solidFill>
+                          <a:latin typeface="Helvetica Neue"/>
+                          <a:ea typeface="Helvetica Neue"/>
+                          <a:cs typeface="Helvetica Neue"/>
+                        </a:rPr>
+                        <a:t>3,10</a:t>
+                      </a:r>
+                    </a:p>
+                  </a:txBody>
+                  <a:tcPr marL="114300" marR="114300" marT="28575" marB="28575" anchor="ctr">
+                    <a:solidFill>
+                      <a:srgbClr val="0B1C32"/>
+                    </a:solidFill>
+                  </a:tcPr>
+                </a:tc>
+                <a:tc>
+                  <a:txBody>
+                    <a:bodyPr/>
+                    <a:lstStyle/>
+                    <a:p>
+                      <a:r>
+                        <a:rPr sz="1275" b="0">
+                          <a:solidFill>
+                            <a:srgbClr val="F1F3F5"/>
+                          </a:solidFill>
+                          <a:latin typeface="Helvetica Neue"/>
+                          <a:ea typeface="Helvetica Neue"/>
+                          <a:cs typeface="Helvetica Neue"/>
+                        </a:rPr>
+                        <a:t>2,80</a:t>
+                      </a:r>
+                    </a:p>
+                  </a:txBody>
+                  <a:tcPr marL="114300" marR="114300" marT="28575" marB="28575" anchor="ctr">
+                    <a:solidFill>
+                      <a:srgbClr val="0B1C32"/>
+                    </a:solidFill>
+                  </a:tcPr>
+                </a:tc>
+              </a:tr>
+            </a:tbl>
+          </a:graphicData>
+        </a:graphic>
+      </p:graphicFrame>
     </p:spTree>
     <p:extLst>
       <p:ext uri="{BB962C8B-B14F-4D97-AF65-F5344CB8AC3E}">
